--- a/metro/metro-f08-buyer-tip.pptx
+++ b/metro/metro-f08-buyer-tip.pptx
@@ -3734,9 +3734,9 @@
                 <a:solidFill>
                   <a:srgbClr val="14161A"/>
                 </a:solidFill>
-                <a:latin typeface="Space Grotesk"/>
-                <a:ea typeface="Space Grotesk"/>
-                <a:cs typeface="Space Grotesk"/>
+                <a:latin typeface="HK Grotesk"/>
+                <a:ea typeface="HK Grotesk"/>
+                <a:cs typeface="HK Grotesk"/>
               </a:rPr>
               <a:t>NO</a:t>
             </a:r>
@@ -3773,9 +3773,9 @@
                 <a:solidFill>
                   <a:srgbClr val="14161A"/>
                 </a:solidFill>
-                <a:latin typeface="Space Grotesk"/>
-                <a:ea typeface="Space Grotesk"/>
-                <a:cs typeface="Space Grotesk"/>
+                <a:latin typeface="HK Grotesk"/>
+                <a:ea typeface="HK Grotesk"/>
+                <a:cs typeface="HK Grotesk"/>
               </a:rPr>
               <a:t>North &amp; Oak</a:t>
             </a:r>
@@ -3917,9 +3917,9 @@
                 <a:solidFill>
                   <a:srgbClr val="14161A"/>
                 </a:solidFill>
-                <a:latin typeface="Space Grotesk"/>
-                <a:ea typeface="Space Grotesk"/>
-                <a:cs typeface="Space Grotesk"/>
+                <a:latin typeface="HK Grotesk"/>
+                <a:ea typeface="HK Grotesk"/>
+                <a:cs typeface="HK Grotesk"/>
               </a:rPr>
               <a:t>Get the inspection before you fall in love.</a:t>
             </a:r>
@@ -3956,9 +3956,9 @@
                 <a:solidFill>
                   <a:srgbClr val="24272E"/>
                 </a:solidFill>
-                <a:latin typeface="Space Grotesk"/>
-                <a:ea typeface="Space Grotesk"/>
-                <a:cs typeface="Space Grotesk"/>
+                <a:latin typeface="HK Grotesk"/>
+                <a:ea typeface="HK Grotesk"/>
+                <a:cs typeface="HK Grotesk"/>
               </a:rPr>
               <a:t>Tour with your heart, but write the offer with your head. A pre-offer walkthrough with your inspector catches the expensive surprises — HVAC, plumbing, the assessment history — while you still have room to negotiate.</a:t>
             </a:r>
@@ -3991,9 +3991,9 @@
                 <a:solidFill>
                   <a:srgbClr val="8A8F99"/>
                 </a:solidFill>
-                <a:latin typeface="Space Grotesk"/>
-                <a:ea typeface="Space Grotesk"/>
-                <a:cs typeface="Space Grotesk"/>
+                <a:latin typeface="HK Grotesk"/>
+                <a:ea typeface="HK Grotesk"/>
+                <a:cs typeface="HK Grotesk"/>
               </a:rPr>
               <a:t>— A note from Julian Reyes</a:t>
             </a:r>
